--- a/Seminar_S_cerevisiae_stresni_markerji.pptx
+++ b/Seminar_S_cerevisiae_stresni_markerji.pptx
@@ -3845,310 +3845,6 @@
       </p:sp>
       <p:sp>
         <p:nvSpPr>
-          <p:cNvPr id="27" name="Shape 22"/>
-          <p:cNvSpPr/>
-          <p:nvPr/>
-        </p:nvSpPr>
-        <p:spPr>
-          <a:xfrm>
-            <a:off x="548640" y="5852160"/>
-            <a:ext cx="11064240" cy="457200"/>
-          </a:xfrm>
-          <a:prstGeom prst="rect">
-            <a:avLst/>
-          </a:prstGeom>
-          <a:solidFill>
-            <a:srgbClr val="0F766E"/>
-          </a:solidFill>
-          <a:ln w="12700">
-            <a:solidFill>
-              <a:srgbClr val="0F766E"/>
-            </a:solidFill>
-            <a:prstDash val="solid"/>
-          </a:ln>
-        </p:spPr>
-        <p:txBody>
-          <a:bodyPr/>
-          <a:lstStyle/>
-          <a:p>
-            <a:endParaRPr lang="en-SI"/>
-          </a:p>
-        </p:txBody>
-      </p:sp>
-      <p:sp>
-        <p:nvSpPr>
-          <p:cNvPr id="28" name="Text 23"/>
-          <p:cNvSpPr/>
-          <p:nvPr/>
-        </p:nvSpPr>
-        <p:spPr>
-          <a:xfrm>
-            <a:off x="548640" y="5852160"/>
-            <a:ext cx="11064240" cy="457200"/>
-          </a:xfrm>
-          <a:prstGeom prst="rect">
-            <a:avLst/>
-          </a:prstGeom>
-          <a:noFill/>
-          <a:ln/>
-        </p:spPr>
-        <p:txBody>
-          <a:bodyPr wrap="square" lIns="0" tIns="0" rIns="0" bIns="0" rtlCol="0" anchor="ctr"/>
-          <a:lstStyle/>
-          <a:p>
-            <a:pPr algn="ctr"/>
-            <a:r>
-              <a:rPr lang="en-US" sz="1300" b="1">
-                <a:solidFill>
-                  <a:srgbClr val="FFFFFF"/>
-                </a:solidFill>
-                <a:latin typeface="Calibri"/>
-                <a:ea typeface="Calibri"/>
-                <a:cs typeface="Calibri"/>
-              </a:rPr>
-              <a:t>mitohondrijska </a:t>
-            </a:r>
-            <a:r>
-              <a:rPr lang="en-US" sz="1300" b="1" err="1">
-                <a:solidFill>
-                  <a:srgbClr val="FFFFFF"/>
-                </a:solidFill>
-                <a:latin typeface="Calibri"/>
-                <a:ea typeface="Calibri"/>
-                <a:cs typeface="Calibri"/>
-              </a:rPr>
-              <a:t>obremenitev</a:t>
-            </a:r>
-            <a:r>
-              <a:rPr lang="en-US" sz="1300" b="1">
-                <a:solidFill>
-                  <a:srgbClr val="FFFFFF"/>
-                </a:solidFill>
-                <a:latin typeface="Calibri"/>
-                <a:ea typeface="Calibri"/>
-                <a:cs typeface="Calibri"/>
-              </a:rPr>
-              <a:t> + </a:t>
-            </a:r>
-            <a:r>
-              <a:rPr lang="en-US" sz="1300" b="1" err="1">
-                <a:solidFill>
-                  <a:srgbClr val="FFFFFF"/>
-                </a:solidFill>
-                <a:latin typeface="Calibri"/>
-                <a:ea typeface="Calibri"/>
-                <a:cs typeface="Calibri"/>
-              </a:rPr>
-              <a:t>reorganizacija</a:t>
-            </a:r>
-            <a:r>
-              <a:rPr lang="en-US" sz="1300" b="1">
-                <a:solidFill>
-                  <a:srgbClr val="FFFFFF"/>
-                </a:solidFill>
-                <a:latin typeface="Calibri"/>
-                <a:ea typeface="Calibri"/>
-                <a:cs typeface="Calibri"/>
-              </a:rPr>
-              <a:t> </a:t>
-            </a:r>
-            <a:r>
-              <a:rPr lang="en-US" sz="1300" b="1" err="1">
-                <a:solidFill>
-                  <a:srgbClr val="FFFFFF"/>
-                </a:solidFill>
-                <a:latin typeface="Calibri"/>
-                <a:ea typeface="Calibri"/>
-                <a:cs typeface="Calibri"/>
-              </a:rPr>
-              <a:t>izrezovalnega</a:t>
-            </a:r>
-            <a:r>
-              <a:rPr lang="en-US" sz="1300" b="1">
-                <a:solidFill>
-                  <a:srgbClr val="FFFFFF"/>
-                </a:solidFill>
-                <a:latin typeface="Calibri"/>
-                <a:ea typeface="Calibri"/>
-                <a:cs typeface="Calibri"/>
-              </a:rPr>
-              <a:t> </a:t>
-            </a:r>
-            <a:r>
-              <a:rPr lang="en-US" sz="1300" b="1" err="1">
-                <a:solidFill>
-                  <a:srgbClr val="FFFFFF"/>
-                </a:solidFill>
-                <a:latin typeface="Calibri"/>
-                <a:ea typeface="Calibri"/>
-                <a:cs typeface="Calibri"/>
-              </a:rPr>
-              <a:t>telesca</a:t>
-            </a:r>
-            <a:r>
-              <a:rPr lang="en-US" sz="1300" b="1">
-                <a:solidFill>
-                  <a:srgbClr val="FFFFFF"/>
-                </a:solidFill>
-                <a:latin typeface="Calibri"/>
-                <a:ea typeface="Calibri"/>
-                <a:cs typeface="Calibri"/>
-              </a:rPr>
-              <a:t> + </a:t>
-            </a:r>
-            <a:r>
-              <a:rPr lang="en-US" sz="1300" b="1" err="1">
-                <a:solidFill>
-                  <a:srgbClr val="FFFFFF"/>
-                </a:solidFill>
-                <a:latin typeface="Calibri"/>
-                <a:ea typeface="Calibri"/>
-                <a:cs typeface="Calibri"/>
-              </a:rPr>
-              <a:t>zmanjšanje</a:t>
-            </a:r>
-            <a:r>
-              <a:rPr lang="en-US" sz="1300" b="1">
-                <a:solidFill>
-                  <a:srgbClr val="FFFFFF"/>
-                </a:solidFill>
-                <a:latin typeface="Calibri"/>
-                <a:ea typeface="Calibri"/>
-                <a:cs typeface="Calibri"/>
-              </a:rPr>
-              <a:t> </a:t>
-            </a:r>
-            <a:r>
-              <a:rPr lang="en-US" sz="1300" b="1" err="1">
-                <a:solidFill>
-                  <a:srgbClr val="FFFFFF"/>
-                </a:solidFill>
-                <a:latin typeface="Calibri"/>
-                <a:ea typeface="Calibri"/>
-                <a:cs typeface="Calibri"/>
-              </a:rPr>
-              <a:t>proteinske</a:t>
-            </a:r>
-            <a:r>
-              <a:rPr lang="en-US" sz="1300" b="1">
-                <a:solidFill>
-                  <a:srgbClr val="FFFFFF"/>
-                </a:solidFill>
-                <a:latin typeface="Calibri"/>
-                <a:ea typeface="Calibri"/>
-                <a:cs typeface="Calibri"/>
-              </a:rPr>
-              <a:t> </a:t>
-            </a:r>
-            <a:r>
-              <a:rPr lang="en-US" sz="1300" b="1" err="1">
-                <a:solidFill>
-                  <a:srgbClr val="FFFFFF"/>
-                </a:solidFill>
-                <a:latin typeface="Calibri"/>
-                <a:ea typeface="Calibri"/>
-                <a:cs typeface="Calibri"/>
-              </a:rPr>
-              <a:t>sinteze</a:t>
-            </a:r>
-            <a:r>
-              <a:rPr lang="en-US" sz="1300" b="1">
-                <a:solidFill>
-                  <a:srgbClr val="FFFFFF"/>
-                </a:solidFill>
-                <a:latin typeface="Calibri"/>
-                <a:ea typeface="Calibri"/>
-                <a:cs typeface="Calibri"/>
-              </a:rPr>
-              <a:t> = </a:t>
-            </a:r>
-            <a:r>
-              <a:rPr lang="en-US" sz="1300" b="1" err="1">
-                <a:solidFill>
-                  <a:srgbClr val="FFFFFF"/>
-                </a:solidFill>
-                <a:latin typeface="Calibri"/>
-                <a:ea typeface="Calibri"/>
-                <a:cs typeface="Calibri"/>
-              </a:rPr>
-              <a:t>jedro</a:t>
-            </a:r>
-            <a:r>
-              <a:rPr lang="en-US" sz="1300" b="1">
-                <a:solidFill>
-                  <a:srgbClr val="FFFFFF"/>
-                </a:solidFill>
-                <a:latin typeface="Calibri"/>
-                <a:ea typeface="Calibri"/>
-                <a:cs typeface="Calibri"/>
-              </a:rPr>
-              <a:t> </a:t>
-            </a:r>
-            <a:r>
-              <a:rPr lang="en-US" sz="1300" b="1" err="1">
-                <a:solidFill>
-                  <a:srgbClr val="FFFFFF"/>
-                </a:solidFill>
-                <a:latin typeface="Calibri"/>
-                <a:ea typeface="Calibri"/>
-                <a:cs typeface="Calibri"/>
-              </a:rPr>
-              <a:t>splošnega</a:t>
-            </a:r>
-            <a:r>
-              <a:rPr lang="en-US" sz="1300" b="1">
-                <a:solidFill>
-                  <a:srgbClr val="FFFFFF"/>
-                </a:solidFill>
-                <a:latin typeface="Calibri"/>
-                <a:ea typeface="Calibri"/>
-                <a:cs typeface="Calibri"/>
-              </a:rPr>
-              <a:t> </a:t>
-            </a:r>
-            <a:r>
-              <a:rPr lang="en-US" sz="1300" b="1" err="1">
-                <a:solidFill>
-                  <a:srgbClr val="FFFFFF"/>
-                </a:solidFill>
-                <a:latin typeface="Calibri"/>
-                <a:ea typeface="Calibri"/>
-                <a:cs typeface="Calibri"/>
-              </a:rPr>
-              <a:t>stresnega</a:t>
-            </a:r>
-            <a:r>
-              <a:rPr lang="en-US" sz="1300" b="1">
-                <a:solidFill>
-                  <a:srgbClr val="FFFFFF"/>
-                </a:solidFill>
-                <a:latin typeface="Calibri"/>
-                <a:ea typeface="Calibri"/>
-                <a:cs typeface="Calibri"/>
-              </a:rPr>
-              <a:t> </a:t>
-            </a:r>
-            <a:r>
-              <a:rPr lang="en-US" sz="1300" b="1" err="1">
-                <a:solidFill>
-                  <a:srgbClr val="FFFFFF"/>
-                </a:solidFill>
-                <a:latin typeface="Calibri"/>
-                <a:ea typeface="Calibri"/>
-                <a:cs typeface="Calibri"/>
-              </a:rPr>
-              <a:t>odziva</a:t>
-            </a:r>
-            <a:endParaRPr lang="en-US" sz="1300" err="1">
-              <a:latin typeface="Calibri"/>
-              <a:ea typeface="Calibri"/>
-              <a:cs typeface="Calibri"/>
-            </a:endParaRPr>
-          </a:p>
-        </p:txBody>
-      </p:sp>
-      <p:sp>
-        <p:nvSpPr>
           <p:cNvPr id="29" name="Shape 24"/>
           <p:cNvSpPr/>
           <p:nvPr/>
@@ -5962,7 +5658,7 @@
         </p:nvSpPr>
         <p:spPr>
           <a:xfrm>
-            <a:off x="1188720" y="2240280"/>
+            <a:off x="1188720" y="2358264"/>
             <a:ext cx="10424160" cy="640080"/>
           </a:xfrm>
           <a:prstGeom prst="rect">
@@ -5979,7 +5675,7 @@
               <a:buNone/>
             </a:pPr>
             <a:r>
-              <a:rPr lang="en-US" sz="1500">
+              <a:rPr lang="en-US" sz="1500" dirty="0" err="1">
                 <a:solidFill>
                   <a:srgbClr val="F1F5F9"/>
                 </a:solidFill>
@@ -5987,9 +5683,218 @@
                 <a:ea typeface="Calibri" pitchFamily="34" charset="-122"/>
                 <a:cs typeface="Calibri" pitchFamily="34" charset="-120"/>
               </a:rPr>
-              <a:t>Identificirali smo 150 genov skupnega stresnega odgovora — DEG-i v vseh treh pogojih.</a:t>
-            </a:r>
-            <a:endParaRPr lang="en-US" sz="1500"/>
+              <a:t>Identificirali</a:t>
+            </a:r>
+            <a:r>
+              <a:rPr lang="en-US" sz="1500" dirty="0">
+                <a:solidFill>
+                  <a:srgbClr val="F1F5F9"/>
+                </a:solidFill>
+                <a:latin typeface="Calibri" pitchFamily="34" charset="0"/>
+                <a:ea typeface="Calibri" pitchFamily="34" charset="-122"/>
+                <a:cs typeface="Calibri" pitchFamily="34" charset="-120"/>
+              </a:rPr>
+              <a:t> </a:t>
+            </a:r>
+            <a:r>
+              <a:rPr lang="en-US" sz="1500" dirty="0" err="1">
+                <a:solidFill>
+                  <a:srgbClr val="F1F5F9"/>
+                </a:solidFill>
+                <a:latin typeface="Calibri" pitchFamily="34" charset="0"/>
+                <a:ea typeface="Calibri" pitchFamily="34" charset="-122"/>
+                <a:cs typeface="Calibri" pitchFamily="34" charset="-120"/>
+              </a:rPr>
+              <a:t>smo</a:t>
+            </a:r>
+            <a:r>
+              <a:rPr lang="en-US" sz="1500" dirty="0">
+                <a:solidFill>
+                  <a:srgbClr val="F1F5F9"/>
+                </a:solidFill>
+                <a:latin typeface="Calibri" pitchFamily="34" charset="0"/>
+                <a:ea typeface="Calibri" pitchFamily="34" charset="-122"/>
+                <a:cs typeface="Calibri" pitchFamily="34" charset="-120"/>
+              </a:rPr>
+              <a:t> 150 </a:t>
+            </a:r>
+            <a:r>
+              <a:rPr lang="en-US" sz="1500" dirty="0" err="1">
+                <a:solidFill>
+                  <a:srgbClr val="F1F5F9"/>
+                </a:solidFill>
+                <a:latin typeface="Calibri" pitchFamily="34" charset="0"/>
+                <a:ea typeface="Calibri" pitchFamily="34" charset="-122"/>
+                <a:cs typeface="Calibri" pitchFamily="34" charset="-120"/>
+              </a:rPr>
+              <a:t>genov</a:t>
+            </a:r>
+            <a:r>
+              <a:rPr lang="en-US" sz="1500" dirty="0">
+                <a:solidFill>
+                  <a:srgbClr val="F1F5F9"/>
+                </a:solidFill>
+                <a:latin typeface="Calibri" pitchFamily="34" charset="0"/>
+                <a:ea typeface="Calibri" pitchFamily="34" charset="-122"/>
+                <a:cs typeface="Calibri" pitchFamily="34" charset="-120"/>
+              </a:rPr>
+              <a:t> </a:t>
+            </a:r>
+            <a:r>
+              <a:rPr lang="en-US" sz="1500" dirty="0" err="1">
+                <a:solidFill>
+                  <a:srgbClr val="F1F5F9"/>
+                </a:solidFill>
+                <a:latin typeface="Calibri" pitchFamily="34" charset="0"/>
+                <a:ea typeface="Calibri" pitchFamily="34" charset="-122"/>
+                <a:cs typeface="Calibri" pitchFamily="34" charset="-120"/>
+              </a:rPr>
+              <a:t>skupnega</a:t>
+            </a:r>
+            <a:r>
+              <a:rPr lang="en-US" sz="1500" dirty="0">
+                <a:solidFill>
+                  <a:srgbClr val="F1F5F9"/>
+                </a:solidFill>
+                <a:latin typeface="Calibri" pitchFamily="34" charset="0"/>
+                <a:ea typeface="Calibri" pitchFamily="34" charset="-122"/>
+                <a:cs typeface="Calibri" pitchFamily="34" charset="-120"/>
+              </a:rPr>
+              <a:t> </a:t>
+            </a:r>
+            <a:r>
+              <a:rPr lang="en-US" sz="1500" dirty="0" err="1">
+                <a:solidFill>
+                  <a:srgbClr val="F1F5F9"/>
+                </a:solidFill>
+                <a:latin typeface="Calibri" pitchFamily="34" charset="0"/>
+                <a:ea typeface="Calibri" pitchFamily="34" charset="-122"/>
+                <a:cs typeface="Calibri" pitchFamily="34" charset="-120"/>
+              </a:rPr>
+              <a:t>stresnega</a:t>
+            </a:r>
+            <a:r>
+              <a:rPr lang="en-US" sz="1500" dirty="0">
+                <a:solidFill>
+                  <a:srgbClr val="F1F5F9"/>
+                </a:solidFill>
+                <a:latin typeface="Calibri" pitchFamily="34" charset="0"/>
+                <a:ea typeface="Calibri" pitchFamily="34" charset="-122"/>
+                <a:cs typeface="Calibri" pitchFamily="34" charset="-120"/>
+              </a:rPr>
+              <a:t> </a:t>
+            </a:r>
+            <a:r>
+              <a:rPr lang="en-US" sz="1500" dirty="0" err="1">
+                <a:solidFill>
+                  <a:srgbClr val="F1F5F9"/>
+                </a:solidFill>
+                <a:latin typeface="Calibri" pitchFamily="34" charset="0"/>
+                <a:ea typeface="Calibri" pitchFamily="34" charset="-122"/>
+                <a:cs typeface="Calibri" pitchFamily="34" charset="-120"/>
+              </a:rPr>
+              <a:t>odgovora</a:t>
+            </a:r>
+            <a:r>
+              <a:rPr lang="en-US" sz="1500" dirty="0">
+                <a:solidFill>
+                  <a:srgbClr val="F1F5F9"/>
+                </a:solidFill>
+                <a:latin typeface="Calibri" pitchFamily="34" charset="0"/>
+                <a:ea typeface="Calibri" pitchFamily="34" charset="-122"/>
+                <a:cs typeface="Calibri" pitchFamily="34" charset="-120"/>
+              </a:rPr>
+              <a:t> — DEG-</a:t>
+            </a:r>
+            <a:r>
+              <a:rPr lang="en-US" sz="1500" dirty="0" err="1">
+                <a:solidFill>
+                  <a:srgbClr val="F1F5F9"/>
+                </a:solidFill>
+                <a:latin typeface="Calibri" pitchFamily="34" charset="0"/>
+                <a:ea typeface="Calibri" pitchFamily="34" charset="-122"/>
+                <a:cs typeface="Calibri" pitchFamily="34" charset="-120"/>
+              </a:rPr>
+              <a:t>i</a:t>
+            </a:r>
+            <a:r>
+              <a:rPr lang="en-US" sz="1500" dirty="0">
+                <a:solidFill>
+                  <a:srgbClr val="F1F5F9"/>
+                </a:solidFill>
+                <a:latin typeface="Calibri" pitchFamily="34" charset="0"/>
+                <a:ea typeface="Calibri" pitchFamily="34" charset="-122"/>
+                <a:cs typeface="Calibri" pitchFamily="34" charset="-120"/>
+              </a:rPr>
+              <a:t> v </a:t>
+            </a:r>
+            <a:r>
+              <a:rPr lang="en-US" sz="1500" dirty="0" err="1">
+                <a:solidFill>
+                  <a:srgbClr val="F1F5F9"/>
+                </a:solidFill>
+                <a:latin typeface="Calibri" pitchFamily="34" charset="0"/>
+                <a:ea typeface="Calibri" pitchFamily="34" charset="-122"/>
+                <a:cs typeface="Calibri" pitchFamily="34" charset="-120"/>
+              </a:rPr>
+              <a:t>vseh</a:t>
+            </a:r>
+            <a:r>
+              <a:rPr lang="en-US" sz="1500" dirty="0">
+                <a:solidFill>
+                  <a:srgbClr val="F1F5F9"/>
+                </a:solidFill>
+                <a:latin typeface="Calibri" pitchFamily="34" charset="0"/>
+                <a:ea typeface="Calibri" pitchFamily="34" charset="-122"/>
+                <a:cs typeface="Calibri" pitchFamily="34" charset="-120"/>
+              </a:rPr>
+              <a:t> </a:t>
+            </a:r>
+            <a:r>
+              <a:rPr lang="en-US" sz="1500" dirty="0" err="1">
+                <a:solidFill>
+                  <a:srgbClr val="F1F5F9"/>
+                </a:solidFill>
+                <a:latin typeface="Calibri" pitchFamily="34" charset="0"/>
+                <a:ea typeface="Calibri" pitchFamily="34" charset="-122"/>
+                <a:cs typeface="Calibri" pitchFamily="34" charset="-120"/>
+              </a:rPr>
+              <a:t>treh</a:t>
+            </a:r>
+            <a:r>
+              <a:rPr lang="en-US" sz="1500" dirty="0">
+                <a:solidFill>
+                  <a:srgbClr val="F1F5F9"/>
+                </a:solidFill>
+                <a:latin typeface="Calibri" pitchFamily="34" charset="0"/>
+                <a:ea typeface="Calibri" pitchFamily="34" charset="-122"/>
+                <a:cs typeface="Calibri" pitchFamily="34" charset="-120"/>
+              </a:rPr>
+              <a:t> </a:t>
+            </a:r>
+            <a:r>
+              <a:rPr lang="en-US" sz="1500" dirty="0" err="1">
+                <a:solidFill>
+                  <a:srgbClr val="F1F5F9"/>
+                </a:solidFill>
+                <a:latin typeface="Calibri" pitchFamily="34" charset="0"/>
+                <a:ea typeface="Calibri" pitchFamily="34" charset="-122"/>
+                <a:cs typeface="Calibri" pitchFamily="34" charset="-120"/>
+              </a:rPr>
+              <a:t>pogojih</a:t>
+            </a:r>
+            <a:r>
+              <a:rPr lang="en-US" sz="1500" dirty="0">
+                <a:solidFill>
+                  <a:srgbClr val="F1F5F9"/>
+                </a:solidFill>
+                <a:latin typeface="Calibri" pitchFamily="34" charset="0"/>
+                <a:ea typeface="Calibri" pitchFamily="34" charset="-122"/>
+                <a:cs typeface="Calibri" pitchFamily="34" charset="-120"/>
+              </a:rPr>
+              <a:t>.</a:t>
+            </a:r>
+            <a:endParaRPr lang="en-US" sz="1500" dirty="0"/>
           </a:p>
         </p:txBody>
       </p:sp>
@@ -6072,7 +5977,7 @@
         </p:nvSpPr>
         <p:spPr>
           <a:xfrm>
-            <a:off x="1188720" y="3108960"/>
+            <a:off x="1188720" y="3217112"/>
             <a:ext cx="10424160" cy="640080"/>
           </a:xfrm>
           <a:prstGeom prst="rect">
@@ -6085,9 +5990,6 @@
           <a:bodyPr wrap="square" lIns="0" tIns="0" rIns="0" bIns="0" rtlCol="0" anchor="t"/>
           <a:lstStyle/>
           <a:p>
-            <a:pPr marL="0" indent="0">
-              <a:buNone/>
-            </a:pPr>
             <a:r>
               <a:rPr lang="en-US" sz="1500">
                 <a:solidFill>
@@ -6097,9 +5999,9 @@
                 <a:ea typeface="Calibri" pitchFamily="34" charset="-122"/>
                 <a:cs typeface="Calibri" pitchFamily="34" charset="-120"/>
               </a:rPr>
-              <a:t>Skupni vzorec: preklop iz fermentacije v respiracijo + reorganizacija RNA-aparata + upočasnitev translacije.</a:t>
-            </a:r>
-            <a:endParaRPr lang="en-US" sz="1500"/>
+              <a:t>Štirje ključni geni (ZNF1, SME1, FMP25, DUS3) predstavljajo kandidatne markerje splošnega stresnega odziva pri S. cerevisiae.</a:t>
+            </a:r>
+            <a:endParaRPr lang="en-US" sz="1500" dirty="0"/>
           </a:p>
         </p:txBody>
       </p:sp>
@@ -6182,7 +6084,7 @@
         </p:nvSpPr>
         <p:spPr>
           <a:xfrm>
-            <a:off x="1188720" y="3977640"/>
+            <a:off x="1188720" y="4085792"/>
             <a:ext cx="10424160" cy="640080"/>
           </a:xfrm>
           <a:prstGeom prst="rect">
@@ -6195,11 +6097,8 @@
           <a:bodyPr wrap="square" lIns="0" tIns="0" rIns="0" bIns="0" rtlCol="0" anchor="t"/>
           <a:lstStyle/>
           <a:p>
-            <a:pPr marL="0" indent="0">
-              <a:buNone/>
-            </a:pPr>
-            <a:r>
-              <a:rPr lang="en-US" sz="1500">
+            <a:r>
+              <a:rPr lang="en-US" sz="1500" dirty="0" err="1">
                 <a:solidFill>
                   <a:srgbClr val="F1F5F9"/>
                 </a:solidFill>
@@ -6207,9 +6106,218 @@
                 <a:ea typeface="Calibri" pitchFamily="34" charset="-122"/>
                 <a:cs typeface="Calibri" pitchFamily="34" charset="-120"/>
               </a:rPr>
-              <a:t>Štirje ključni geni (ZNF1, SME1, FMP25, DUS3) predstavljajo kandidatne markerje splošnega stresnega odziva pri S. cerevisiae.</a:t>
-            </a:r>
-            <a:endParaRPr lang="en-US" sz="1500"/>
+              <a:t>Skupni</a:t>
+            </a:r>
+            <a:r>
+              <a:rPr lang="en-US" sz="1500" dirty="0">
+                <a:solidFill>
+                  <a:srgbClr val="F1F5F9"/>
+                </a:solidFill>
+                <a:latin typeface="Calibri" pitchFamily="34" charset="0"/>
+                <a:ea typeface="Calibri" pitchFamily="34" charset="-122"/>
+                <a:cs typeface="Calibri" pitchFamily="34" charset="-120"/>
+              </a:rPr>
+              <a:t> </a:t>
+            </a:r>
+            <a:r>
+              <a:rPr lang="en-US" sz="1500" dirty="0" err="1">
+                <a:solidFill>
+                  <a:srgbClr val="F1F5F9"/>
+                </a:solidFill>
+                <a:latin typeface="Calibri" pitchFamily="34" charset="0"/>
+                <a:ea typeface="Calibri" pitchFamily="34" charset="-122"/>
+                <a:cs typeface="Calibri" pitchFamily="34" charset="-120"/>
+              </a:rPr>
+              <a:t>vzorec</a:t>
+            </a:r>
+            <a:r>
+              <a:rPr lang="en-US" sz="1500" dirty="0">
+                <a:solidFill>
+                  <a:srgbClr val="F1F5F9"/>
+                </a:solidFill>
+                <a:latin typeface="Calibri" pitchFamily="34" charset="0"/>
+                <a:ea typeface="Calibri" pitchFamily="34" charset="-122"/>
+                <a:cs typeface="Calibri" pitchFamily="34" charset="-120"/>
+              </a:rPr>
+              <a:t>: </a:t>
+            </a:r>
+            <a:r>
+              <a:rPr lang="en-US" sz="1500" dirty="0" err="1">
+                <a:solidFill>
+                  <a:srgbClr val="F1F5F9"/>
+                </a:solidFill>
+                <a:latin typeface="Calibri" pitchFamily="34" charset="0"/>
+                <a:ea typeface="Calibri" pitchFamily="34" charset="-122"/>
+                <a:cs typeface="Calibri" pitchFamily="34" charset="-120"/>
+              </a:rPr>
+              <a:t>preklop</a:t>
+            </a:r>
+            <a:r>
+              <a:rPr lang="en-US" sz="1500" dirty="0">
+                <a:solidFill>
+                  <a:srgbClr val="F1F5F9"/>
+                </a:solidFill>
+                <a:latin typeface="Calibri" pitchFamily="34" charset="0"/>
+                <a:ea typeface="Calibri" pitchFamily="34" charset="-122"/>
+                <a:cs typeface="Calibri" pitchFamily="34" charset="-120"/>
+              </a:rPr>
+              <a:t> </a:t>
+            </a:r>
+            <a:r>
+              <a:rPr lang="en-US" sz="1500" dirty="0" err="1">
+                <a:solidFill>
+                  <a:srgbClr val="F1F5F9"/>
+                </a:solidFill>
+                <a:latin typeface="Calibri" pitchFamily="34" charset="0"/>
+                <a:ea typeface="Calibri" pitchFamily="34" charset="-122"/>
+                <a:cs typeface="Calibri" pitchFamily="34" charset="-120"/>
+              </a:rPr>
+              <a:t>iz</a:t>
+            </a:r>
+            <a:r>
+              <a:rPr lang="en-US" sz="1500" dirty="0">
+                <a:solidFill>
+                  <a:srgbClr val="F1F5F9"/>
+                </a:solidFill>
+                <a:latin typeface="Calibri" pitchFamily="34" charset="0"/>
+                <a:ea typeface="Calibri" pitchFamily="34" charset="-122"/>
+                <a:cs typeface="Calibri" pitchFamily="34" charset="-120"/>
+              </a:rPr>
+              <a:t> </a:t>
+            </a:r>
+            <a:r>
+              <a:rPr lang="en-US" sz="1500" dirty="0" err="1">
+                <a:solidFill>
+                  <a:srgbClr val="F1F5F9"/>
+                </a:solidFill>
+                <a:latin typeface="Calibri" pitchFamily="34" charset="0"/>
+                <a:ea typeface="Calibri" pitchFamily="34" charset="-122"/>
+                <a:cs typeface="Calibri" pitchFamily="34" charset="-120"/>
+              </a:rPr>
+              <a:t>fermentacije</a:t>
+            </a:r>
+            <a:r>
+              <a:rPr lang="en-US" sz="1500" dirty="0">
+                <a:solidFill>
+                  <a:srgbClr val="F1F5F9"/>
+                </a:solidFill>
+                <a:latin typeface="Calibri" pitchFamily="34" charset="0"/>
+                <a:ea typeface="Calibri" pitchFamily="34" charset="-122"/>
+                <a:cs typeface="Calibri" pitchFamily="34" charset="-120"/>
+              </a:rPr>
+              <a:t> v </a:t>
+            </a:r>
+            <a:r>
+              <a:rPr lang="en-US" sz="1500" dirty="0" err="1">
+                <a:solidFill>
+                  <a:srgbClr val="F1F5F9"/>
+                </a:solidFill>
+                <a:latin typeface="Calibri" pitchFamily="34" charset="0"/>
+                <a:ea typeface="Calibri" pitchFamily="34" charset="-122"/>
+                <a:cs typeface="Calibri" pitchFamily="34" charset="-120"/>
+              </a:rPr>
+              <a:t>respiracijo</a:t>
+            </a:r>
+            <a:r>
+              <a:rPr lang="en-US" sz="1500" dirty="0">
+                <a:solidFill>
+                  <a:srgbClr val="F1F5F9"/>
+                </a:solidFill>
+                <a:latin typeface="Calibri" pitchFamily="34" charset="0"/>
+                <a:ea typeface="Calibri" pitchFamily="34" charset="-122"/>
+                <a:cs typeface="Calibri" pitchFamily="34" charset="-120"/>
+              </a:rPr>
+              <a:t> + </a:t>
+            </a:r>
+            <a:r>
+              <a:rPr lang="en-US" sz="1500" dirty="0" err="1">
+                <a:solidFill>
+                  <a:srgbClr val="F1F5F9"/>
+                </a:solidFill>
+                <a:latin typeface="Calibri" pitchFamily="34" charset="0"/>
+                <a:ea typeface="Calibri" pitchFamily="34" charset="-122"/>
+                <a:cs typeface="Calibri" pitchFamily="34" charset="-120"/>
+              </a:rPr>
+              <a:t>reorganizacija</a:t>
+            </a:r>
+            <a:r>
+              <a:rPr lang="en-US" sz="1500" dirty="0">
+                <a:solidFill>
+                  <a:srgbClr val="F1F5F9"/>
+                </a:solidFill>
+                <a:latin typeface="Calibri" pitchFamily="34" charset="0"/>
+                <a:ea typeface="Calibri" pitchFamily="34" charset="-122"/>
+                <a:cs typeface="Calibri" pitchFamily="34" charset="-120"/>
+              </a:rPr>
+              <a:t> RNA-</a:t>
+            </a:r>
+            <a:r>
+              <a:rPr lang="en-US" sz="1500" dirty="0" err="1">
+                <a:solidFill>
+                  <a:srgbClr val="F1F5F9"/>
+                </a:solidFill>
+                <a:latin typeface="Calibri" pitchFamily="34" charset="0"/>
+                <a:ea typeface="Calibri" pitchFamily="34" charset="-122"/>
+                <a:cs typeface="Calibri" pitchFamily="34" charset="-120"/>
+              </a:rPr>
+              <a:t>aparata</a:t>
+            </a:r>
+            <a:r>
+              <a:rPr lang="en-US" sz="1500" dirty="0">
+                <a:solidFill>
+                  <a:srgbClr val="F1F5F9"/>
+                </a:solidFill>
+                <a:latin typeface="Calibri" pitchFamily="34" charset="0"/>
+                <a:ea typeface="Calibri" pitchFamily="34" charset="-122"/>
+                <a:cs typeface="Calibri" pitchFamily="34" charset="-120"/>
+              </a:rPr>
+              <a:t> + </a:t>
+            </a:r>
+            <a:r>
+              <a:rPr lang="en-US" sz="1500" dirty="0" err="1">
+                <a:solidFill>
+                  <a:srgbClr val="F1F5F9"/>
+                </a:solidFill>
+                <a:latin typeface="Calibri" pitchFamily="34" charset="0"/>
+                <a:ea typeface="Calibri" pitchFamily="34" charset="-122"/>
+                <a:cs typeface="Calibri" pitchFamily="34" charset="-120"/>
+              </a:rPr>
+              <a:t>upočasnitev</a:t>
+            </a:r>
+            <a:r>
+              <a:rPr lang="en-US" sz="1500" dirty="0">
+                <a:solidFill>
+                  <a:srgbClr val="F1F5F9"/>
+                </a:solidFill>
+                <a:latin typeface="Calibri" pitchFamily="34" charset="0"/>
+                <a:ea typeface="Calibri" pitchFamily="34" charset="-122"/>
+                <a:cs typeface="Calibri" pitchFamily="34" charset="-120"/>
+              </a:rPr>
+              <a:t> </a:t>
+            </a:r>
+            <a:r>
+              <a:rPr lang="en-US" sz="1500" dirty="0" err="1">
+                <a:solidFill>
+                  <a:srgbClr val="F1F5F9"/>
+                </a:solidFill>
+                <a:latin typeface="Calibri" pitchFamily="34" charset="0"/>
+                <a:ea typeface="Calibri" pitchFamily="34" charset="-122"/>
+                <a:cs typeface="Calibri" pitchFamily="34" charset="-120"/>
+              </a:rPr>
+              <a:t>translacije</a:t>
+            </a:r>
+            <a:r>
+              <a:rPr lang="en-US" sz="1500" dirty="0">
+                <a:solidFill>
+                  <a:srgbClr val="F1F5F9"/>
+                </a:solidFill>
+                <a:latin typeface="Calibri" pitchFamily="34" charset="0"/>
+                <a:ea typeface="Calibri" pitchFamily="34" charset="-122"/>
+                <a:cs typeface="Calibri" pitchFamily="34" charset="-120"/>
+              </a:rPr>
+              <a:t>.</a:t>
+            </a:r>
+            <a:endParaRPr lang="en-US" sz="1500" dirty="0"/>
           </a:p>
         </p:txBody>
       </p:sp>
@@ -8317,7 +8425,7 @@
           <a:lstStyle/>
           <a:p>
             <a:r>
-              <a:rPr lang="en-US" sz="3000" b="1" err="1">
+              <a:rPr lang="en-US" sz="3000" b="1" dirty="0" err="1">
                 <a:solidFill>
                   <a:srgbClr val="1E293B"/>
                 </a:solidFill>
@@ -8328,17 +8436,72 @@
               <a:t>Podatki</a:t>
             </a:r>
             <a:r>
-              <a:rPr lang="en-US" sz="3000" b="1">
-                <a:solidFill>
-                  <a:srgbClr val="1E293B"/>
-                </a:solidFill>
-                <a:latin typeface="Calibri"/>
-                <a:ea typeface="Calibri"/>
-                <a:cs typeface="Calibri"/>
-              </a:rPr>
-              <a:t>: single-cell RNA-seq - GSE201386</a:t>
-            </a:r>
-            <a:endParaRPr lang="en-US" sz="3000">
+              <a:rPr lang="en-US" sz="3000" b="1" dirty="0">
+                <a:solidFill>
+                  <a:srgbClr val="1E293B"/>
+                </a:solidFill>
+                <a:latin typeface="Calibri"/>
+                <a:ea typeface="Calibri"/>
+                <a:cs typeface="Calibri"/>
+              </a:rPr>
+              <a:t>: </a:t>
+            </a:r>
+            <a:r>
+              <a:rPr lang="en-US" sz="3000" b="1" dirty="0" err="1">
+                <a:solidFill>
+                  <a:srgbClr val="1E293B"/>
+                </a:solidFill>
+                <a:latin typeface="Calibri"/>
+                <a:ea typeface="Calibri"/>
+                <a:cs typeface="Calibri"/>
+              </a:rPr>
+              <a:t>enoceli</a:t>
+            </a:r>
+            <a:r>
+              <a:rPr lang="sl-SI" sz="3000" b="1" dirty="0">
+                <a:solidFill>
+                  <a:srgbClr val="1E293B"/>
+                </a:solidFill>
+                <a:latin typeface="Calibri"/>
+                <a:ea typeface="Calibri"/>
+                <a:cs typeface="Calibri"/>
+              </a:rPr>
+              <a:t>čen</a:t>
+            </a:r>
+            <a:r>
+              <a:rPr lang="en-US" sz="3000" b="1" dirty="0">
+                <a:solidFill>
+                  <a:srgbClr val="1E293B"/>
+                </a:solidFill>
+                <a:latin typeface="Calibri"/>
+                <a:ea typeface="Calibri"/>
+                <a:cs typeface="Calibri"/>
+              </a:rPr>
+              <a:t> RNA-se</a:t>
+            </a:r>
+            <a:r>
+              <a:rPr lang="sl-SI" sz="3000" b="1" dirty="0">
+                <a:solidFill>
+                  <a:srgbClr val="1E293B"/>
+                </a:solidFill>
+                <a:latin typeface="Calibri"/>
+                <a:ea typeface="Calibri"/>
+                <a:cs typeface="Calibri"/>
+              </a:rPr>
+              <a:t>q</a:t>
+            </a:r>
+            <a:r>
+              <a:rPr lang="en-US" sz="3000" b="1" dirty="0">
+                <a:solidFill>
+                  <a:srgbClr val="1E293B"/>
+                </a:solidFill>
+                <a:latin typeface="Calibri"/>
+                <a:ea typeface="Calibri"/>
+                <a:cs typeface="Calibri"/>
+              </a:rPr>
+              <a:t> - GSE201386</a:t>
+            </a:r>
+            <a:endParaRPr lang="en-US" sz="3000" dirty="0">
               <a:latin typeface="Calibri"/>
               <a:ea typeface="Calibri"/>
               <a:cs typeface="Calibri"/>
@@ -9998,7 +10161,7 @@
                         <a:buNone/>
                       </a:pPr>
                       <a:r>
-                        <a:rPr lang="en-US" sz="1200" b="1">
+                        <a:rPr lang="en-US" sz="1200" b="1" dirty="0">
                           <a:solidFill>
                             <a:srgbClr val="1E293B"/>
                           </a:solidFill>
@@ -10008,7 +10171,7 @@
                         </a:rPr>
                         <a:t>47</a:t>
                       </a:r>
-                      <a:endParaRPr lang="en-US" sz="1200">
+                      <a:endParaRPr lang="en-US" sz="1200" dirty="0">
                         <a:latin typeface="Calibri" charset="0"/>
                         <a:ea typeface="Calibri" charset="0"/>
                         <a:cs typeface="Calibri" charset="0"/>
@@ -10217,7 +10380,7 @@
               <a:buNone/>
             </a:pPr>
             <a:r>
-              <a:rPr lang="en-US" sz="1000" b="1" kern="0" spc="300">
+              <a:rPr lang="en-US" sz="1000" b="1" kern="0" spc="300" dirty="0">
                 <a:solidFill>
                   <a:srgbClr val="5EEAD4"/>
                 </a:solidFill>
@@ -10227,7 +10390,7 @@
               </a:rPr>
               <a:t>METODA</a:t>
             </a:r>
-            <a:endParaRPr lang="en-US" sz="1000"/>
+            <a:endParaRPr lang="en-US" sz="1000" dirty="0"/>
           </a:p>
           <a:p>
             <a:pPr marL="0" indent="0">
@@ -10237,7 +10400,7 @@
               <a:buNone/>
             </a:pPr>
             <a:r>
-              <a:rPr lang="en-US" sz="1200">
+              <a:rPr lang="en-US" sz="1200" dirty="0">
                 <a:solidFill>
                   <a:srgbClr val="FFFFFF"/>
                 </a:solidFill>
@@ -10245,16 +10408,49 @@
                 <a:ea typeface="Calibri" pitchFamily="34" charset="-122"/>
                 <a:cs typeface="Calibri" pitchFamily="34" charset="-120"/>
               </a:rPr>
-              <a:t>Single-cell RNA-seq  •  1 celica = 1 vzorec</a:t>
-            </a:r>
-            <a:endParaRPr lang="en-US" sz="1000"/>
+              <a:t>Single-cell RNA-seq  •  1 </a:t>
+            </a:r>
+            <a:r>
+              <a:rPr lang="en-US" sz="1200" dirty="0" err="1">
+                <a:solidFill>
+                  <a:srgbClr val="FFFFFF"/>
+                </a:solidFill>
+                <a:latin typeface="Calibri" pitchFamily="34" charset="0"/>
+                <a:ea typeface="Calibri" pitchFamily="34" charset="-122"/>
+                <a:cs typeface="Calibri" pitchFamily="34" charset="-120"/>
+              </a:rPr>
+              <a:t>celica</a:t>
+            </a:r>
+            <a:r>
+              <a:rPr lang="en-US" sz="1200" dirty="0">
+                <a:solidFill>
+                  <a:srgbClr val="FFFFFF"/>
+                </a:solidFill>
+                <a:latin typeface="Calibri" pitchFamily="34" charset="0"/>
+                <a:ea typeface="Calibri" pitchFamily="34" charset="-122"/>
+                <a:cs typeface="Calibri" pitchFamily="34" charset="-120"/>
+              </a:rPr>
+              <a:t> = 1 </a:t>
+            </a:r>
+            <a:r>
+              <a:rPr lang="en-US" sz="1200" dirty="0" err="1">
+                <a:solidFill>
+                  <a:srgbClr val="FFFFFF"/>
+                </a:solidFill>
+                <a:latin typeface="Calibri" pitchFamily="34" charset="0"/>
+                <a:ea typeface="Calibri" pitchFamily="34" charset="-122"/>
+                <a:cs typeface="Calibri" pitchFamily="34" charset="-120"/>
+              </a:rPr>
+              <a:t>vzorec</a:t>
+            </a:r>
+            <a:endParaRPr lang="en-US" sz="1000" dirty="0"/>
           </a:p>
           <a:p>
             <a:pPr marL="0" indent="0">
               <a:buNone/>
             </a:pPr>
             <a:r>
-              <a:rPr lang="en-US" sz="1000" b="1" kern="0" spc="300">
+              <a:rPr lang="en-US" sz="1000" b="1" kern="0" spc="300" dirty="0">
                 <a:solidFill>
                   <a:srgbClr val="5EEAD4"/>
                 </a:solidFill>
@@ -10264,14 +10460,14 @@
               </a:rPr>
               <a:t>VHODNA MATRIKA</a:t>
             </a:r>
-            <a:endParaRPr lang="en-US" sz="1000"/>
+            <a:endParaRPr lang="en-US" sz="1000" dirty="0"/>
           </a:p>
           <a:p>
             <a:pPr marL="0" indent="0">
               <a:buNone/>
             </a:pPr>
             <a:r>
-              <a:rPr lang="en-US" sz="1200">
+              <a:rPr lang="en-US" sz="1200" dirty="0">
                 <a:solidFill>
                   <a:srgbClr val="FFFFFF"/>
                 </a:solidFill>
@@ -10279,9 +10475,42 @@
                 <a:ea typeface="Calibri" pitchFamily="34" charset="-122"/>
                 <a:cs typeface="Calibri" pitchFamily="34" charset="-120"/>
               </a:rPr>
-              <a:t>~6000 genov × 117 celic</a:t>
-            </a:r>
-            <a:endParaRPr lang="en-US" sz="1000"/>
+              <a:t>~6000 </a:t>
+            </a:r>
+            <a:r>
+              <a:rPr lang="en-US" sz="1200" dirty="0" err="1">
+                <a:solidFill>
+                  <a:srgbClr val="FFFFFF"/>
+                </a:solidFill>
+                <a:latin typeface="Calibri" pitchFamily="34" charset="0"/>
+                <a:ea typeface="Calibri" pitchFamily="34" charset="-122"/>
+                <a:cs typeface="Calibri" pitchFamily="34" charset="-120"/>
+              </a:rPr>
+              <a:t>genov</a:t>
+            </a:r>
+            <a:r>
+              <a:rPr lang="en-US" sz="1200" dirty="0">
+                <a:solidFill>
+                  <a:srgbClr val="FFFFFF"/>
+                </a:solidFill>
+                <a:latin typeface="Calibri" pitchFamily="34" charset="0"/>
+                <a:ea typeface="Calibri" pitchFamily="34" charset="-122"/>
+                <a:cs typeface="Calibri" pitchFamily="34" charset="-120"/>
+              </a:rPr>
+              <a:t> × 117 </a:t>
+            </a:r>
+            <a:r>
+              <a:rPr lang="en-US" sz="1200" dirty="0" err="1">
+                <a:solidFill>
+                  <a:srgbClr val="FFFFFF"/>
+                </a:solidFill>
+                <a:latin typeface="Calibri" pitchFamily="34" charset="0"/>
+                <a:ea typeface="Calibri" pitchFamily="34" charset="-122"/>
+                <a:cs typeface="Calibri" pitchFamily="34" charset="-120"/>
+              </a:rPr>
+              <a:t>celic</a:t>
+            </a:r>
+            <a:endParaRPr lang="en-US" sz="1000" dirty="0"/>
           </a:p>
         </p:txBody>
       </p:sp>
@@ -10848,17 +11077,94 @@
               <a:buNone/>
             </a:pPr>
             <a:r>
-              <a:rPr lang="en-US" sz="1200">
-                <a:solidFill>
-                  <a:srgbClr val="1E293B"/>
-                </a:solidFill>
-                <a:latin typeface="Calibri" pitchFamily="34" charset="0"/>
-                <a:ea typeface="Calibri" pitchFamily="34" charset="-122"/>
-                <a:cs typeface="Calibri" pitchFamily="34" charset="-120"/>
-              </a:rPr>
-              <a:t>Združitev 117 datotek v ekspresijsko matriko 6000 × 117</a:t>
-            </a:r>
-            <a:endParaRPr lang="en-US" sz="1200"/>
+              <a:rPr lang="en-US" sz="1200" dirty="0" err="1">
+                <a:solidFill>
+                  <a:srgbClr val="1E293B"/>
+                </a:solidFill>
+                <a:latin typeface="Calibri" pitchFamily="34" charset="0"/>
+                <a:ea typeface="Calibri" pitchFamily="34" charset="-122"/>
+                <a:cs typeface="Calibri" pitchFamily="34" charset="-120"/>
+              </a:rPr>
+              <a:t>Združitev</a:t>
+            </a:r>
+            <a:r>
+              <a:rPr lang="en-US" sz="1200" dirty="0">
+                <a:solidFill>
+                  <a:srgbClr val="1E293B"/>
+                </a:solidFill>
+                <a:latin typeface="Calibri" pitchFamily="34" charset="0"/>
+                <a:ea typeface="Calibri" pitchFamily="34" charset="-122"/>
+                <a:cs typeface="Calibri" pitchFamily="34" charset="-120"/>
+              </a:rPr>
+              <a:t> 117 </a:t>
+            </a:r>
+            <a:r>
+              <a:rPr lang="en-US" sz="1200" dirty="0" err="1">
+                <a:solidFill>
+                  <a:srgbClr val="1E293B"/>
+                </a:solidFill>
+                <a:latin typeface="Calibri" pitchFamily="34" charset="0"/>
+                <a:ea typeface="Calibri" pitchFamily="34" charset="-122"/>
+                <a:cs typeface="Calibri" pitchFamily="34" charset="-120"/>
+              </a:rPr>
+              <a:t>datotek</a:t>
+            </a:r>
+            <a:r>
+              <a:rPr lang="en-US" sz="1200" dirty="0">
+                <a:solidFill>
+                  <a:srgbClr val="1E293B"/>
+                </a:solidFill>
+                <a:latin typeface="Calibri" pitchFamily="34" charset="0"/>
+                <a:ea typeface="Calibri" pitchFamily="34" charset="-122"/>
+                <a:cs typeface="Calibri" pitchFamily="34" charset="-120"/>
+              </a:rPr>
+              <a:t> v </a:t>
+            </a:r>
+            <a:r>
+              <a:rPr lang="en-US" sz="1200" dirty="0" err="1">
+                <a:solidFill>
+                  <a:srgbClr val="1E293B"/>
+                </a:solidFill>
+                <a:latin typeface="Calibri" pitchFamily="34" charset="0"/>
+                <a:ea typeface="Calibri" pitchFamily="34" charset="-122"/>
+                <a:cs typeface="Calibri" pitchFamily="34" charset="-120"/>
+              </a:rPr>
+              <a:t>ekspresijsko</a:t>
+            </a:r>
+            <a:r>
+              <a:rPr lang="en-US" sz="1200" dirty="0">
+                <a:solidFill>
+                  <a:srgbClr val="1E293B"/>
+                </a:solidFill>
+                <a:latin typeface="Calibri" pitchFamily="34" charset="0"/>
+                <a:ea typeface="Calibri" pitchFamily="34" charset="-122"/>
+                <a:cs typeface="Calibri" pitchFamily="34" charset="-120"/>
+              </a:rPr>
+              <a:t> </a:t>
+            </a:r>
+            <a:r>
+              <a:rPr lang="en-US" sz="1200" dirty="0" err="1">
+                <a:solidFill>
+                  <a:srgbClr val="1E293B"/>
+                </a:solidFill>
+                <a:latin typeface="Calibri" pitchFamily="34" charset="0"/>
+                <a:ea typeface="Calibri" pitchFamily="34" charset="-122"/>
+                <a:cs typeface="Calibri" pitchFamily="34" charset="-120"/>
+              </a:rPr>
+              <a:t>matriko</a:t>
+            </a:r>
+            <a:r>
+              <a:rPr lang="en-US" sz="1200" dirty="0">
+                <a:solidFill>
+                  <a:srgbClr val="1E293B"/>
+                </a:solidFill>
+                <a:latin typeface="Calibri" pitchFamily="34" charset="0"/>
+                <a:ea typeface="Calibri" pitchFamily="34" charset="-122"/>
+                <a:cs typeface="Calibri" pitchFamily="34" charset="-120"/>
+              </a:rPr>
+              <a:t> 6000 × 117</a:t>
+            </a:r>
+            <a:endParaRPr lang="en-US" sz="1200" dirty="0"/>
           </a:p>
         </p:txBody>
       </p:sp>
@@ -20618,12 +20924,11 @@
 </file>
 
 <file path=customXml/item1.xml><?xml version="1.0" encoding="utf-8"?>
-<?mso-contentType ?>
-<FormTemplates xmlns="http://schemas.microsoft.com/sharepoint/v3/contenttype/forms">
-  <Display>DocumentLibraryForm</Display>
-  <Edit>DocumentLibraryForm</Edit>
-  <New>DocumentLibraryForm</New>
-</FormTemplates>
+<p:properties xmlns:p="http://schemas.microsoft.com/office/2006/metadata/properties" xmlns:xsi="http://www.w3.org/2001/XMLSchema-instance" xmlns:pc="http://schemas.microsoft.com/office/infopath/2007/PartnerControls">
+  <documentManagement>
+    <_activity xmlns="594dbca1-ef02-4bb1-935d-576f522ee38e" xsi:nil="true"/>
+  </documentManagement>
+</p:properties>
 </file>
 
 <file path=customXml/item2.xml><?xml version="1.0" encoding="utf-8"?>
@@ -20783,17 +21088,26 @@
 </file>
 
 <file path=customXml/item3.xml><?xml version="1.0" encoding="utf-8"?>
-<p:properties xmlns:p="http://schemas.microsoft.com/office/2006/metadata/properties" xmlns:xsi="http://www.w3.org/2001/XMLSchema-instance" xmlns:pc="http://schemas.microsoft.com/office/infopath/2007/PartnerControls">
-  <documentManagement>
-    <_activity xmlns="594dbca1-ef02-4bb1-935d-576f522ee38e" xsi:nil="true"/>
-  </documentManagement>
-</p:properties>
+<?mso-contentType ?>
+<FormTemplates xmlns="http://schemas.microsoft.com/sharepoint/v3/contenttype/forms">
+  <Display>DocumentLibraryForm</Display>
+  <Edit>DocumentLibraryForm</Edit>
+  <New>DocumentLibraryForm</New>
+</FormTemplates>
 </file>
 
 <file path=customXml/itemProps1.xml><?xml version="1.0" encoding="utf-8"?>
-<ds:datastoreItem xmlns:ds="http://schemas.openxmlformats.org/officeDocument/2006/customXml" ds:itemID="{7F0D7471-7619-4D10-98E0-6D3A1CF306AA}">
+<ds:datastoreItem xmlns:ds="http://schemas.openxmlformats.org/officeDocument/2006/customXml" ds:itemID="{73B4C05F-614C-410D-AAED-4539041C8610}">
   <ds:schemaRefs>
-    <ds:schemaRef ds:uri="http://schemas.microsoft.com/sharepoint/v3/contenttype/forms"/>
+    <ds:schemaRef ds:uri="594dbca1-ef02-4bb1-935d-576f522ee38e"/>
+    <ds:schemaRef ds:uri="http://purl.org/dc/dcmitype/"/>
+    <ds:schemaRef ds:uri="http://purl.org/dc/elements/1.1/"/>
+    <ds:schemaRef ds:uri="http://purl.org/dc/terms/"/>
+    <ds:schemaRef ds:uri="http://schemas.microsoft.com/office/2006/documentManagement/types"/>
+    <ds:schemaRef ds:uri="http://schemas.microsoft.com/office/2006/metadata/properties"/>
+    <ds:schemaRef ds:uri="http://schemas.microsoft.com/office/infopath/2007/PartnerControls"/>
+    <ds:schemaRef ds:uri="http://schemas.openxmlformats.org/package/2006/metadata/core-properties"/>
+    <ds:schemaRef ds:uri="http://www.w3.org/XML/1998/namespace"/>
   </ds:schemaRefs>
 </ds:datastoreItem>
 </file>
@@ -20817,17 +21131,9 @@
 </file>
 
 <file path=customXml/itemProps3.xml><?xml version="1.0" encoding="utf-8"?>
-<ds:datastoreItem xmlns:ds="http://schemas.openxmlformats.org/officeDocument/2006/customXml" ds:itemID="{73B4C05F-614C-410D-AAED-4539041C8610}">
+<ds:datastoreItem xmlns:ds="http://schemas.openxmlformats.org/officeDocument/2006/customXml" ds:itemID="{7F0D7471-7619-4D10-98E0-6D3A1CF306AA}">
   <ds:schemaRefs>
-    <ds:schemaRef ds:uri="594dbca1-ef02-4bb1-935d-576f522ee38e"/>
-    <ds:schemaRef ds:uri="http://purl.org/dc/dcmitype/"/>
-    <ds:schemaRef ds:uri="http://purl.org/dc/elements/1.1/"/>
-    <ds:schemaRef ds:uri="http://purl.org/dc/terms/"/>
-    <ds:schemaRef ds:uri="http://schemas.microsoft.com/office/2006/documentManagement/types"/>
-    <ds:schemaRef ds:uri="http://schemas.microsoft.com/office/2006/metadata/properties"/>
-    <ds:schemaRef ds:uri="http://schemas.microsoft.com/office/infopath/2007/PartnerControls"/>
-    <ds:schemaRef ds:uri="http://schemas.openxmlformats.org/package/2006/metadata/core-properties"/>
-    <ds:schemaRef ds:uri="http://www.w3.org/XML/1998/namespace"/>
+    <ds:schemaRef ds:uri="http://schemas.microsoft.com/sharepoint/v3/contenttype/forms"/>
   </ds:schemaRefs>
 </ds:datastoreItem>
 </file>